--- a/m8/diapositivos/sessao-03-m8-f04.pptx
+++ b/m8/diapositivos/sessao-03-m8-f04.pptx
@@ -2624,7 +2624,87 @@
                 <a:ea typeface="Georgia" pitchFamily="34" charset="-122"/>
                 <a:cs typeface="Georgia" pitchFamily="34" charset="-120"/>
               </a:rPr>
-              <a:t>Eugénio de Andrade, «As Palavras», Até Amanhã; texto e vídeo na RTP Ensina, programa Voz (2005, dito por Beatriz Batarda).</a:t>
+              <a:t>Eugénio de Andrade, «As Palavras», </a:t>
+            </a:r>
+            <a:pPr indent="0" marL="0">
+              <a:lnSpc>
+                <a:spcPct val="110000"/>
+              </a:lnSpc>
+              <a:spcAft>
+                <a:spcPts val="1400"/>
+              </a:spcAft>
+              <a:buNone/>
+            </a:pPr>
+            <a:r>
+              <a:rPr lang="en-US" sz="2200" i="1" dirty="0">
+                <a:solidFill>
+                  <a:srgbClr val="F2F0EA"/>
+                </a:solidFill>
+                <a:latin typeface="Georgia" pitchFamily="34" charset="0"/>
+                <a:ea typeface="Georgia" pitchFamily="34" charset="-122"/>
+                <a:cs typeface="Georgia" pitchFamily="34" charset="-120"/>
+              </a:rPr>
+              <a:t>Até Amanhã</a:t>
+            </a:r>
+            <a:pPr indent="0" marL="0">
+              <a:lnSpc>
+                <a:spcPct val="110000"/>
+              </a:lnSpc>
+              <a:spcAft>
+                <a:spcPts val="1400"/>
+              </a:spcAft>
+              <a:buNone/>
+            </a:pPr>
+            <a:r>
+              <a:rPr lang="en-US" sz="2200" dirty="0">
+                <a:solidFill>
+                  <a:srgbClr val="F2F0EA"/>
+                </a:solidFill>
+                <a:latin typeface="Georgia" pitchFamily="34" charset="0"/>
+                <a:ea typeface="Georgia" pitchFamily="34" charset="-122"/>
+                <a:cs typeface="Georgia" pitchFamily="34" charset="-120"/>
+              </a:rPr>
+              <a:t>; texto e vídeo na RTP Ensina, programa </a:t>
+            </a:r>
+            <a:pPr indent="0" marL="0">
+              <a:lnSpc>
+                <a:spcPct val="110000"/>
+              </a:lnSpc>
+              <a:spcAft>
+                <a:spcPts val="1400"/>
+              </a:spcAft>
+              <a:buNone/>
+            </a:pPr>
+            <a:r>
+              <a:rPr lang="en-US" sz="2200" i="1" dirty="0">
+                <a:solidFill>
+                  <a:srgbClr val="F2F0EA"/>
+                </a:solidFill>
+                <a:latin typeface="Georgia" pitchFamily="34" charset="0"/>
+                <a:ea typeface="Georgia" pitchFamily="34" charset="-122"/>
+                <a:cs typeface="Georgia" pitchFamily="34" charset="-120"/>
+              </a:rPr>
+              <a:t>Voz</a:t>
+            </a:r>
+            <a:pPr indent="0" marL="0">
+              <a:lnSpc>
+                <a:spcPct val="110000"/>
+              </a:lnSpc>
+              <a:spcAft>
+                <a:spcPts val="1400"/>
+              </a:spcAft>
+              <a:buNone/>
+            </a:pPr>
+            <a:r>
+              <a:rPr lang="en-US" sz="2200" dirty="0">
+                <a:solidFill>
+                  <a:srgbClr val="F2F0EA"/>
+                </a:solidFill>
+                <a:latin typeface="Georgia" pitchFamily="34" charset="0"/>
+                <a:ea typeface="Georgia" pitchFamily="34" charset="-122"/>
+                <a:cs typeface="Georgia" pitchFamily="34" charset="-120"/>
+              </a:rPr>
+              <a:t> (2005, dito por Beatriz Batarda).</a:t>
             </a:r>
             <a:endParaRPr lang="en-US" sz="2200" dirty="0"/>
           </a:p>
@@ -3139,7 +3219,41 @@
                 <a:ea typeface="Arial" pitchFamily="34" charset="-122"/>
                 <a:cs typeface="Arial" pitchFamily="34" charset="-120"/>
               </a:rPr>
-              <a:t>«As Palavras», do livro Até Amanhã, abre com uma comparação, «São como um cristal, / as palavras», e acaba com duas perguntas que ficam sem resposta.</a:t>
+              <a:t>«As Palavras», do livro </a:t>
+            </a:r>
+            <a:pPr indent="0" marL="0">
+              <a:lnSpc>
+                <a:spcPct val="105000"/>
+              </a:lnSpc>
+              <a:buNone/>
+            </a:pPr>
+            <a:r>
+              <a:rPr lang="en-US" sz="2200" i="1" dirty="0">
+                <a:solidFill>
+                  <a:srgbClr val="F2F0EA"/>
+                </a:solidFill>
+                <a:latin typeface="Arial" pitchFamily="34" charset="0"/>
+                <a:ea typeface="Arial" pitchFamily="34" charset="-122"/>
+                <a:cs typeface="Arial" pitchFamily="34" charset="-120"/>
+              </a:rPr>
+              <a:t>Até Amanhã</a:t>
+            </a:r>
+            <a:pPr indent="0" marL="0">
+              <a:lnSpc>
+                <a:spcPct val="105000"/>
+              </a:lnSpc>
+              <a:buNone/>
+            </a:pPr>
+            <a:r>
+              <a:rPr lang="en-US" sz="2200" dirty="0">
+                <a:solidFill>
+                  <a:srgbClr val="F2F0EA"/>
+                </a:solidFill>
+                <a:latin typeface="Arial" pitchFamily="34" charset="0"/>
+                <a:ea typeface="Arial" pitchFamily="34" charset="-122"/>
+                <a:cs typeface="Arial" pitchFamily="34" charset="-120"/>
+              </a:rPr>
+              <a:t>, abre com uma comparação, «São como um cristal, / as palavras», e acaba com duas perguntas que ficam sem resposta.</a:t>
             </a:r>
             <a:endParaRPr lang="en-US" sz="2200" dirty="0"/>
           </a:p>
